--- a/native/HDDS_공통설계가이드_V1.0.pptx
+++ b/native/HDDS_공통설계가이드_V1.0.pptx
@@ -5219,8 +5219,8 @@
         </p:nvSpPr>
         <p:spPr>
           <a:xfrm>
-            <a:off x="975335" y="2880360"/>
-            <a:ext cx="10241023" cy="548640"/>
+            <a:off x="487667" y="137160"/>
+            <a:ext cx="4876678" cy="308610"/>
           </a:xfrm>
           <a:prstGeom prst="rect">
             <a:avLst/>
@@ -5235,7 +5235,7 @@
           <a:p>
             <a:pPr algn="l"/>
             <a:r>
-              <a:rPr sz="1300" b="1">
+              <a:rPr sz="1000" b="1">
                 <a:solidFill>
                   <a:srgbClr val="767676"/>
                 </a:solidFill>
@@ -5254,8 +5254,8 @@
         </p:nvSpPr>
         <p:spPr>
           <a:xfrm>
-            <a:off x="975335" y="3223260"/>
-            <a:ext cx="10241023" cy="685800"/>
+            <a:off x="1463003" y="3154680"/>
+            <a:ext cx="9265688" cy="822960"/>
           </a:xfrm>
           <a:prstGeom prst="rect">
             <a:avLst/>
@@ -5268,9 +5268,9 @@
           </a:bodyPr>
           <a:lstStyle/>
           <a:p>
-            <a:pPr algn="l"/>
-            <a:r>
-              <a:rPr sz="2600" b="1">
+            <a:pPr algn="ctr"/>
+            <a:r>
+              <a:rPr sz="2800" b="1">
                 <a:solidFill>
                   <a:srgbClr val="1A1A1A"/>
                 </a:solidFill>
@@ -5278,6 +5278,50 @@
               </a:rPr>
               <a:t>4. 공통 모듈 3종 정의</a:t>
             </a:r>
+          </a:p>
+        </p:txBody>
+      </p:sp>
+      <p:sp>
+        <p:nvSpPr>
+          <p:cNvPr id="5" name="Rectangle 4"/>
+          <p:cNvSpPr/>
+          <p:nvPr/>
+        </p:nvSpPr>
+        <p:spPr>
+          <a:xfrm>
+            <a:off x="5608179" y="4114800"/>
+            <a:ext cx="975335" cy="27432"/>
+          </a:xfrm>
+          <a:prstGeom prst="rect">
+            <a:avLst/>
+          </a:prstGeom>
+          <a:solidFill>
+            <a:srgbClr val="1A1A1A"/>
+          </a:solidFill>
+          <a:ln>
+            <a:noFill/>
+          </a:ln>
+          <a:effectLst/>
+        </p:spPr>
+        <p:style>
+          <a:lnRef idx="1">
+            <a:schemeClr val="accent1"/>
+          </a:lnRef>
+          <a:fillRef idx="3">
+            <a:schemeClr val="accent1"/>
+          </a:fillRef>
+          <a:effectRef idx="2">
+            <a:schemeClr val="accent1"/>
+          </a:effectRef>
+          <a:fontRef idx="minor">
+            <a:schemeClr val="lt1"/>
+          </a:fontRef>
+        </p:style>
+        <p:txBody>
+          <a:bodyPr rtlCol="0" anchor="ctr"/>
+          <a:lstStyle/>
+          <a:p>
+            <a:pPr algn="ctr"/>
           </a:p>
         </p:txBody>
       </p:sp>
